--- a/output_pptx/Lead_Me_To_The_Cross.pptx
+++ b/output_pptx/Lead_Me_To_The_Cross.pptx
@@ -3117,8 +3117,8 @@
         </p:nvSpPr>
         <p:spPr>
           <a:xfrm>
-            <a:off x="594360" y="2258568"/>
-            <a:ext cx="11002975" cy="685800"/>
+            <a:off x="640080" y="2052828"/>
+            <a:ext cx="10911535" cy="731520"/>
           </a:xfrm>
           <a:prstGeom prst="rect">
             <a:avLst/>
@@ -3133,7 +3133,7 @@
           <a:p>
             <a:pPr algn="ctr"/>
             <a:r>
-              <a:rPr sz="4400" b="1" i="0">
+              <a:rPr sz="4800" b="1" i="0">
                 <a:solidFill>
                   <a:srgbClr val="FFFFFF"/>
                 </a:solidFill>
@@ -3152,8 +3152,8 @@
         </p:nvSpPr>
         <p:spPr>
           <a:xfrm>
-            <a:off x="594360" y="2980944"/>
-            <a:ext cx="11002975" cy="347472"/>
+            <a:off x="640080" y="2985516"/>
+            <a:ext cx="10911535" cy="731520"/>
           </a:xfrm>
           <a:prstGeom prst="rect">
             <a:avLst/>
@@ -3168,83 +3168,13 @@
           <a:p>
             <a:pPr algn="ctr"/>
             <a:r>
-              <a:rPr sz="2200" b="0" i="1">
-                <a:solidFill>
-                  <a:srgbClr val="8C8C8C"/>
-                </a:solidFill>
-                <a:latin typeface="Arial"/>
-              </a:rPr>
-              <a:t/>
-            </a:r>
-          </a:p>
-        </p:txBody>
-      </p:sp>
-      <p:sp>
-        <p:nvSpPr>
-          <p:cNvPr id="4" name="TextBox 3"/>
-          <p:cNvSpPr txBox="1"/>
-          <p:nvPr/>
-        </p:nvSpPr>
-        <p:spPr>
-          <a:xfrm>
-            <a:off x="594360" y="3529584"/>
-            <a:ext cx="11002975" cy="685800"/>
-          </a:xfrm>
-          <a:prstGeom prst="rect">
-            <a:avLst/>
-          </a:prstGeom>
-          <a:noFill/>
-        </p:spPr>
-        <p:txBody>
-          <a:bodyPr wrap="square">
-            <a:spAutoFit/>
-          </a:bodyPr>
-          <a:lstStyle/>
-          <a:p>
-            <a:pPr algn="ctr"/>
-            <a:r>
-              <a:rPr sz="4400" b="1" i="0">
+              <a:rPr sz="4800" b="1" i="0">
                 <a:solidFill>
                   <a:srgbClr val="FFFFFF"/>
                 </a:solidFill>
                 <a:latin typeface="Arial"/>
               </a:rPr>
               <a:t>Aquieto a minha alma e me lembro</a:t>
-            </a:r>
-          </a:p>
-        </p:txBody>
-      </p:sp>
-      <p:sp>
-        <p:nvSpPr>
-          <p:cNvPr id="5" name="TextBox 4"/>
-          <p:cNvSpPr txBox="1"/>
-          <p:nvPr/>
-        </p:nvSpPr>
-        <p:spPr>
-          <a:xfrm>
-            <a:off x="594360" y="4251960"/>
-            <a:ext cx="11002975" cy="347472"/>
-          </a:xfrm>
-          <a:prstGeom prst="rect">
-            <a:avLst/>
-          </a:prstGeom>
-          <a:noFill/>
-        </p:spPr>
-        <p:txBody>
-          <a:bodyPr wrap="square">
-            <a:spAutoFit/>
-          </a:bodyPr>
-          <a:lstStyle/>
-          <a:p>
-            <a:pPr algn="ctr"/>
-            <a:r>
-              <a:rPr sz="2200" b="0" i="1">
-                <a:solidFill>
-                  <a:srgbClr val="8C8C8C"/>
-                </a:solidFill>
-                <a:latin typeface="Arial"/>
-              </a:rPr>
-              <a:t/>
             </a:r>
           </a:p>
         </p:txBody>
@@ -3283,8 +3213,8 @@
         </p:nvSpPr>
         <p:spPr>
           <a:xfrm>
-            <a:off x="594360" y="1837944"/>
-            <a:ext cx="11002975" cy="685800"/>
+            <a:off x="640080" y="1650492"/>
+            <a:ext cx="10911535" cy="731520"/>
           </a:xfrm>
           <a:prstGeom prst="rect">
             <a:avLst/>
@@ -3299,7 +3229,7 @@
           <a:p>
             <a:pPr algn="ctr"/>
             <a:r>
-              <a:rPr sz="4400" b="1" i="0">
+              <a:rPr sz="4800" b="1" i="0">
                 <a:solidFill>
                   <a:srgbClr val="FFFFFF"/>
                 </a:solidFill>
@@ -3318,8 +3248,8 @@
         </p:nvSpPr>
         <p:spPr>
           <a:xfrm>
-            <a:off x="594360" y="2560320"/>
-            <a:ext cx="11002975" cy="384048"/>
+            <a:off x="640080" y="2418588"/>
+            <a:ext cx="10911535" cy="365760"/>
           </a:xfrm>
           <a:prstGeom prst="rect">
             <a:avLst/>
@@ -3336,7 +3266,7 @@
             <a:r>
               <a:rPr sz="2400" b="0" i="1">
                 <a:solidFill>
-                  <a:srgbClr val="B4B4B4"/>
+                  <a:srgbClr val="AAAAAA"/>
                 </a:solidFill>
                 <a:latin typeface="Arial"/>
               </a:rPr>
@@ -3353,8 +3283,8 @@
         </p:nvSpPr>
         <p:spPr>
           <a:xfrm>
-            <a:off x="594360" y="2980944"/>
-            <a:ext cx="11002975" cy="347472"/>
+            <a:off x="640080" y="2985516"/>
+            <a:ext cx="10911535" cy="731520"/>
           </a:xfrm>
           <a:prstGeom prst="rect">
             <a:avLst/>
@@ -3369,13 +3299,13 @@
           <a:p>
             <a:pPr algn="ctr"/>
             <a:r>
-              <a:rPr sz="2000" b="0" i="1">
-                <a:solidFill>
-                  <a:srgbClr val="8C8C8C"/>
+              <a:rPr sz="4800" b="1" i="0">
+                <a:solidFill>
+                  <a:srgbClr val="FFFFFF"/>
                 </a:solidFill>
                 <a:latin typeface="Arial"/>
               </a:rPr>
-              <a:t>Liberte-me de mim mesmo eu pertenço a Ti</a:t>
+              <a:t>主のもとへ</a:t>
             </a:r>
           </a:p>
         </p:txBody>
@@ -3388,8 +3318,8 @@
         </p:nvSpPr>
         <p:spPr>
           <a:xfrm>
-            <a:off x="594360" y="3529584"/>
-            <a:ext cx="11002975" cy="685800"/>
+            <a:off x="640080" y="3753612"/>
+            <a:ext cx="10911535" cy="365760"/>
           </a:xfrm>
           <a:prstGeom prst="rect">
             <a:avLst/>
@@ -3404,13 +3334,13 @@
           <a:p>
             <a:pPr algn="ctr"/>
             <a:r>
-              <a:rPr sz="4400" b="1" i="0">
-                <a:solidFill>
-                  <a:srgbClr val="FFFFFF"/>
+              <a:rPr sz="2400" b="0" i="1">
+                <a:solidFill>
+                  <a:srgbClr val="AAAAAA"/>
                 </a:solidFill>
                 <a:latin typeface="Arial"/>
               </a:rPr>
-              <a:t>主のもとへ</a:t>
+              <a:t>shu no moto he</a:t>
             </a:r>
           </a:p>
         </p:txBody>
@@ -3423,8 +3353,8 @@
         </p:nvSpPr>
         <p:spPr>
           <a:xfrm>
-            <a:off x="594360" y="4251960"/>
-            <a:ext cx="11002975" cy="384048"/>
+            <a:off x="640080" y="4530852"/>
+            <a:ext cx="10911535" cy="310896"/>
           </a:xfrm>
           <a:prstGeom prst="rect">
             <a:avLst/>
@@ -3439,13 +3369,13 @@
           <a:p>
             <a:pPr algn="ctr"/>
             <a:r>
-              <a:rPr sz="2400" b="0" i="1">
-                <a:solidFill>
-                  <a:srgbClr val="B4B4B4"/>
+              <a:rPr sz="2000" b="0" i="1">
+                <a:solidFill>
+                  <a:srgbClr val="828282"/>
                 </a:solidFill>
                 <a:latin typeface="Arial"/>
               </a:rPr>
-              <a:t>shu no moto he</a:t>
+              <a:t>Liberte-me de mim mesmo eu pertenço a Ti</a:t>
             </a:r>
           </a:p>
         </p:txBody>
@@ -3458,8 +3388,8 @@
         </p:nvSpPr>
         <p:spPr>
           <a:xfrm>
-            <a:off x="594360" y="4672584"/>
-            <a:ext cx="11002975" cy="347472"/>
+            <a:off x="640080" y="4896612"/>
+            <a:ext cx="10911535" cy="310896"/>
           </a:xfrm>
           <a:prstGeom prst="rect">
             <a:avLst/>
@@ -3476,7 +3406,7 @@
             <a:r>
               <a:rPr sz="2000" b="0" i="1">
                 <a:solidFill>
-                  <a:srgbClr val="8C8C8C"/>
+                  <a:srgbClr val="828282"/>
                 </a:solidFill>
                 <a:latin typeface="Arial"/>
               </a:rPr>
@@ -3519,8 +3449,8 @@
         </p:nvSpPr>
         <p:spPr>
           <a:xfrm>
-            <a:off x="594360" y="2258568"/>
-            <a:ext cx="11002975" cy="685800"/>
+            <a:off x="640080" y="2052828"/>
+            <a:ext cx="10911535" cy="731520"/>
           </a:xfrm>
           <a:prstGeom prst="rect">
             <a:avLst/>
@@ -3535,7 +3465,7 @@
           <a:p>
             <a:pPr algn="ctr"/>
             <a:r>
-              <a:rPr sz="4400" b="1" i="0">
+              <a:rPr sz="4800" b="1" i="0">
                 <a:solidFill>
                   <a:srgbClr val="FFFFFF"/>
                 </a:solidFill>
@@ -3554,8 +3484,8 @@
         </p:nvSpPr>
         <p:spPr>
           <a:xfrm>
-            <a:off x="594360" y="2980944"/>
-            <a:ext cx="11002975" cy="347472"/>
+            <a:off x="640080" y="2985516"/>
+            <a:ext cx="10911535" cy="731520"/>
           </a:xfrm>
           <a:prstGeom prst="rect">
             <a:avLst/>
@@ -3570,83 +3500,13 @@
           <a:p>
             <a:pPr algn="ctr"/>
             <a:r>
-              <a:rPr sz="2200" b="0" i="1">
-                <a:solidFill>
-                  <a:srgbClr val="8C8C8C"/>
-                </a:solidFill>
-                <a:latin typeface="Arial"/>
-              </a:rPr>
-              <a:t/>
-            </a:r>
-          </a:p>
-        </p:txBody>
-      </p:sp>
-      <p:sp>
-        <p:nvSpPr>
-          <p:cNvPr id="4" name="TextBox 3"/>
-          <p:cNvSpPr txBox="1"/>
-          <p:nvPr/>
-        </p:nvSpPr>
-        <p:spPr>
-          <a:xfrm>
-            <a:off x="594360" y="3529584"/>
-            <a:ext cx="11002975" cy="685800"/>
-          </a:xfrm>
-          <a:prstGeom prst="rect">
-            <a:avLst/>
-          </a:prstGeom>
-          <a:noFill/>
-        </p:spPr>
-        <p:txBody>
-          <a:bodyPr wrap="square">
-            <a:spAutoFit/>
-          </a:bodyPr>
-          <a:lstStyle/>
-          <a:p>
-            <a:pPr algn="ctr"/>
-            <a:r>
-              <a:rPr sz="4400" b="1" i="0">
+              <a:rPr sz="4800" b="1" i="0">
                 <a:solidFill>
                   <a:srgbClr val="FFFFFF"/>
                 </a:solidFill>
                 <a:latin typeface="Arial"/>
               </a:rPr>
               <a:t>Agora Tu ressuscitaste</a:t>
-            </a:r>
-          </a:p>
-        </p:txBody>
-      </p:sp>
-      <p:sp>
-        <p:nvSpPr>
-          <p:cNvPr id="5" name="TextBox 4"/>
-          <p:cNvSpPr txBox="1"/>
-          <p:nvPr/>
-        </p:nvSpPr>
-        <p:spPr>
-          <a:xfrm>
-            <a:off x="594360" y="4251960"/>
-            <a:ext cx="11002975" cy="347472"/>
-          </a:xfrm>
-          <a:prstGeom prst="rect">
-            <a:avLst/>
-          </a:prstGeom>
-          <a:noFill/>
-        </p:spPr>
-        <p:txBody>
-          <a:bodyPr wrap="square">
-            <a:spAutoFit/>
-          </a:bodyPr>
-          <a:lstStyle/>
-          <a:p>
-            <a:pPr algn="ctr"/>
-            <a:r>
-              <a:rPr sz="2200" b="0" i="1">
-                <a:solidFill>
-                  <a:srgbClr val="8C8C8C"/>
-                </a:solidFill>
-                <a:latin typeface="Arial"/>
-              </a:rPr>
-              <a:t/>
             </a:r>
           </a:p>
         </p:txBody>
@@ -3685,8 +3545,8 @@
         </p:nvSpPr>
         <p:spPr>
           <a:xfrm>
-            <a:off x="594360" y="2258568"/>
-            <a:ext cx="11002975" cy="685800"/>
+            <a:off x="640080" y="2052828"/>
+            <a:ext cx="10911535" cy="731520"/>
           </a:xfrm>
           <a:prstGeom prst="rect">
             <a:avLst/>
@@ -3701,7 +3561,7 @@
           <a:p>
             <a:pPr algn="ctr"/>
             <a:r>
-              <a:rPr sz="4141" b="1" i="0">
+              <a:rPr sz="4500" b="1" i="0">
                 <a:solidFill>
                   <a:srgbClr val="FFFFFF"/>
                 </a:solidFill>
@@ -3720,8 +3580,8 @@
         </p:nvSpPr>
         <p:spPr>
           <a:xfrm>
-            <a:off x="594360" y="2980944"/>
-            <a:ext cx="11002975" cy="347472"/>
+            <a:off x="640080" y="2985516"/>
+            <a:ext cx="10911535" cy="731520"/>
           </a:xfrm>
           <a:prstGeom prst="rect">
             <a:avLst/>
@@ -3736,83 +3596,13 @@
           <a:p>
             <a:pPr algn="ctr"/>
             <a:r>
-              <a:rPr sz="2200" b="0" i="1">
-                <a:solidFill>
-                  <a:srgbClr val="8C8C8C"/>
-                </a:solidFill>
-                <a:latin typeface="Arial"/>
-              </a:rPr>
-              <a:t/>
-            </a:r>
-          </a:p>
-        </p:txBody>
-      </p:sp>
-      <p:sp>
-        <p:nvSpPr>
-          <p:cNvPr id="4" name="TextBox 3"/>
-          <p:cNvSpPr txBox="1"/>
-          <p:nvPr/>
-        </p:nvSpPr>
-        <p:spPr>
-          <a:xfrm>
-            <a:off x="594360" y="3529584"/>
-            <a:ext cx="11002975" cy="685800"/>
-          </a:xfrm>
-          <a:prstGeom prst="rect">
-            <a:avLst/>
-          </a:prstGeom>
-          <a:noFill/>
-        </p:spPr>
-        <p:txBody>
-          <a:bodyPr wrap="square">
-            <a:spAutoFit/>
-          </a:bodyPr>
-          <a:lstStyle/>
-          <a:p>
-            <a:pPr algn="ctr"/>
-            <a:r>
-              <a:rPr sz="4400" b="1" i="0">
+              <a:rPr sz="4800" b="1" i="0">
                 <a:solidFill>
                   <a:srgbClr val="FFFFFF"/>
                 </a:solidFill>
                 <a:latin typeface="Arial"/>
               </a:rPr>
               <a:t>Leva-me para Seu coração</a:t>
-            </a:r>
-          </a:p>
-        </p:txBody>
-      </p:sp>
-      <p:sp>
-        <p:nvSpPr>
-          <p:cNvPr id="5" name="TextBox 4"/>
-          <p:cNvSpPr txBox="1"/>
-          <p:nvPr/>
-        </p:nvSpPr>
-        <p:spPr>
-          <a:xfrm>
-            <a:off x="594360" y="4251960"/>
-            <a:ext cx="11002975" cy="347472"/>
-          </a:xfrm>
-          <a:prstGeom prst="rect">
-            <a:avLst/>
-          </a:prstGeom>
-          <a:noFill/>
-        </p:spPr>
-        <p:txBody>
-          <a:bodyPr wrap="square">
-            <a:spAutoFit/>
-          </a:bodyPr>
-          <a:lstStyle/>
-          <a:p>
-            <a:pPr algn="ctr"/>
-            <a:r>
-              <a:rPr sz="2200" b="0" i="1">
-                <a:solidFill>
-                  <a:srgbClr val="8C8C8C"/>
-                </a:solidFill>
-                <a:latin typeface="Arial"/>
-              </a:rPr>
-              <a:t/>
             </a:r>
           </a:p>
         </p:txBody>
@@ -3851,8 +3641,8 @@
         </p:nvSpPr>
         <p:spPr>
           <a:xfrm>
-            <a:off x="594360" y="2258568"/>
-            <a:ext cx="11002975" cy="685800"/>
+            <a:off x="640080" y="2052828"/>
+            <a:ext cx="10911535" cy="731520"/>
           </a:xfrm>
           <a:prstGeom prst="rect">
             <a:avLst/>
@@ -3867,7 +3657,7 @@
           <a:p>
             <a:pPr algn="ctr"/>
             <a:r>
-              <a:rPr sz="4141" b="1" i="0">
+              <a:rPr sz="4500" b="1" i="0">
                 <a:solidFill>
                   <a:srgbClr val="FFFFFF"/>
                 </a:solidFill>
@@ -3886,8 +3676,8 @@
         </p:nvSpPr>
         <p:spPr>
           <a:xfrm>
-            <a:off x="594360" y="2980944"/>
-            <a:ext cx="11002975" cy="347472"/>
+            <a:off x="640080" y="2985516"/>
+            <a:ext cx="10911535" cy="731520"/>
           </a:xfrm>
           <a:prstGeom prst="rect">
             <a:avLst/>
@@ -3902,83 +3692,13 @@
           <a:p>
             <a:pPr algn="ctr"/>
             <a:r>
-              <a:rPr sz="2200" b="0" i="1">
-                <a:solidFill>
-                  <a:srgbClr val="8C8C8C"/>
-                </a:solidFill>
-                <a:latin typeface="Arial"/>
-              </a:rPr>
-              <a:t/>
-            </a:r>
-          </a:p>
-        </p:txBody>
-      </p:sp>
-      <p:sp>
-        <p:nvSpPr>
-          <p:cNvPr id="4" name="TextBox 3"/>
-          <p:cNvSpPr txBox="1"/>
-          <p:nvPr/>
-        </p:nvSpPr>
-        <p:spPr>
-          <a:xfrm>
-            <a:off x="594360" y="3529584"/>
-            <a:ext cx="11002975" cy="685800"/>
-          </a:xfrm>
-          <a:prstGeom prst="rect">
-            <a:avLst/>
-          </a:prstGeom>
-          <a:noFill/>
-        </p:spPr>
-        <p:txBody>
-          <a:bodyPr wrap="square">
-            <a:spAutoFit/>
-          </a:bodyPr>
-          <a:lstStyle/>
-          <a:p>
-            <a:pPr algn="ctr"/>
-            <a:r>
-              <a:rPr sz="4400" b="1" i="0">
+              <a:rPr sz="4800" b="1" i="0">
                 <a:solidFill>
                   <a:srgbClr val="FFFFFF"/>
                 </a:solidFill>
                 <a:latin typeface="Arial"/>
               </a:rPr>
               <a:t>Leva-me para Seu coração</a:t>
-            </a:r>
-          </a:p>
-        </p:txBody>
-      </p:sp>
-      <p:sp>
-        <p:nvSpPr>
-          <p:cNvPr id="5" name="TextBox 4"/>
-          <p:cNvSpPr txBox="1"/>
-          <p:nvPr/>
-        </p:nvSpPr>
-        <p:spPr>
-          <a:xfrm>
-            <a:off x="594360" y="4251960"/>
-            <a:ext cx="11002975" cy="347472"/>
-          </a:xfrm>
-          <a:prstGeom prst="rect">
-            <a:avLst/>
-          </a:prstGeom>
-          <a:noFill/>
-        </p:spPr>
-        <p:txBody>
-          <a:bodyPr wrap="square">
-            <a:spAutoFit/>
-          </a:bodyPr>
-          <a:lstStyle/>
-          <a:p>
-            <a:pPr algn="ctr"/>
-            <a:r>
-              <a:rPr sz="2200" b="0" i="1">
-                <a:solidFill>
-                  <a:srgbClr val="8C8C8C"/>
-                </a:solidFill>
-                <a:latin typeface="Arial"/>
-              </a:rPr>
-              <a:t/>
             </a:r>
           </a:p>
         </p:txBody>
@@ -4017,8 +3737,8 @@
         </p:nvSpPr>
         <p:spPr>
           <a:xfrm>
-            <a:off x="594360" y="2894076"/>
-            <a:ext cx="11002975" cy="685800"/>
+            <a:off x="640080" y="2702052"/>
+            <a:ext cx="10911535" cy="731520"/>
           </a:xfrm>
           <a:prstGeom prst="rect">
             <a:avLst/>
@@ -4033,48 +3753,13 @@
           <a:p>
             <a:pPr algn="ctr"/>
             <a:r>
-              <a:rPr sz="4141" b="1" i="0">
+              <a:rPr sz="4500" b="1" i="0">
                 <a:solidFill>
                   <a:srgbClr val="FFFFFF"/>
                 </a:solidFill>
                 <a:latin typeface="Arial"/>
               </a:rPr>
               <a:t>Para Seu coração, para Seu coração</a:t>
-            </a:r>
-          </a:p>
-        </p:txBody>
-      </p:sp>
-      <p:sp>
-        <p:nvSpPr>
-          <p:cNvPr id="3" name="TextBox 2"/>
-          <p:cNvSpPr txBox="1"/>
-          <p:nvPr/>
-        </p:nvSpPr>
-        <p:spPr>
-          <a:xfrm>
-            <a:off x="594360" y="3616452"/>
-            <a:ext cx="11002975" cy="347472"/>
-          </a:xfrm>
-          <a:prstGeom prst="rect">
-            <a:avLst/>
-          </a:prstGeom>
-          <a:noFill/>
-        </p:spPr>
-        <p:txBody>
-          <a:bodyPr wrap="square">
-            <a:spAutoFit/>
-          </a:bodyPr>
-          <a:lstStyle/>
-          <a:p>
-            <a:pPr algn="ctr"/>
-            <a:r>
-              <a:rPr sz="2200" b="0" i="1">
-                <a:solidFill>
-                  <a:srgbClr val="8C8C8C"/>
-                </a:solidFill>
-                <a:latin typeface="Arial"/>
-              </a:rPr>
-              <a:t/>
             </a:r>
           </a:p>
         </p:txBody>
@@ -4113,8 +3798,8 @@
         </p:nvSpPr>
         <p:spPr>
           <a:xfrm>
-            <a:off x="594360" y="2258568"/>
-            <a:ext cx="11002975" cy="685800"/>
+            <a:off x="640080" y="2052828"/>
+            <a:ext cx="10911535" cy="731520"/>
           </a:xfrm>
           <a:prstGeom prst="rect">
             <a:avLst/>
@@ -4129,7 +3814,7 @@
           <a:p>
             <a:pPr algn="ctr"/>
             <a:r>
-              <a:rPr sz="2816" b="1" i="0">
+              <a:rPr sz="3000" b="1" i="0">
                 <a:solidFill>
                   <a:srgbClr val="FFFFFF"/>
                 </a:solidFill>
@@ -4148,8 +3833,8 @@
         </p:nvSpPr>
         <p:spPr>
           <a:xfrm>
-            <a:off x="594360" y="2980944"/>
-            <a:ext cx="11002975" cy="347472"/>
+            <a:off x="640080" y="2985516"/>
+            <a:ext cx="10911535" cy="731520"/>
           </a:xfrm>
           <a:prstGeom prst="rect">
             <a:avLst/>
@@ -4164,83 +3849,13 @@
           <a:p>
             <a:pPr algn="ctr"/>
             <a:r>
-              <a:rPr sz="2200" b="0" i="1">
-                <a:solidFill>
-                  <a:srgbClr val="8C8C8C"/>
-                </a:solidFill>
-                <a:latin typeface="Arial"/>
-              </a:rPr>
-              <a:t/>
-            </a:r>
-          </a:p>
-        </p:txBody>
-      </p:sp>
-      <p:sp>
-        <p:nvSpPr>
-          <p:cNvPr id="4" name="TextBox 3"/>
-          <p:cNvSpPr txBox="1"/>
-          <p:nvPr/>
-        </p:nvSpPr>
-        <p:spPr>
-          <a:xfrm>
-            <a:off x="594360" y="3529584"/>
-            <a:ext cx="11002975" cy="685800"/>
-          </a:xfrm>
-          <a:prstGeom prst="rect">
-            <a:avLst/>
-          </a:prstGeom>
-          <a:noFill/>
-        </p:spPr>
-        <p:txBody>
-          <a:bodyPr wrap="square">
-            <a:spAutoFit/>
-          </a:bodyPr>
-          <a:lstStyle/>
-          <a:p>
-            <a:pPr algn="ctr"/>
-            <a:r>
-              <a:rPr sz="4400" b="1" i="0">
+              <a:rPr sz="4800" b="1" i="0">
                 <a:solidFill>
                   <a:srgbClr val="FFFFFF"/>
                 </a:solidFill>
                 <a:latin typeface="Arial"/>
               </a:rPr>
               <a:t>Por meu resgate</a:t>
-            </a:r>
-          </a:p>
-        </p:txBody>
-      </p:sp>
-      <p:sp>
-        <p:nvSpPr>
-          <p:cNvPr id="5" name="TextBox 4"/>
-          <p:cNvSpPr txBox="1"/>
-          <p:nvPr/>
-        </p:nvSpPr>
-        <p:spPr>
-          <a:xfrm>
-            <a:off x="594360" y="4251960"/>
-            <a:ext cx="11002975" cy="347472"/>
-          </a:xfrm>
-          <a:prstGeom prst="rect">
-            <a:avLst/>
-          </a:prstGeom>
-          <a:noFill/>
-        </p:spPr>
-        <p:txBody>
-          <a:bodyPr wrap="square">
-            <a:spAutoFit/>
-          </a:bodyPr>
-          <a:lstStyle/>
-          <a:p>
-            <a:pPr algn="ctr"/>
-            <a:r>
-              <a:rPr sz="2200" b="0" i="1">
-                <a:solidFill>
-                  <a:srgbClr val="8C8C8C"/>
-                </a:solidFill>
-                <a:latin typeface="Arial"/>
-              </a:rPr>
-              <a:t/>
             </a:r>
           </a:p>
         </p:txBody>
@@ -4279,8 +3894,8 @@
         </p:nvSpPr>
         <p:spPr>
           <a:xfrm>
-            <a:off x="594360" y="2258568"/>
-            <a:ext cx="11002975" cy="685800"/>
+            <a:off x="640080" y="2052828"/>
+            <a:ext cx="10911535" cy="731520"/>
           </a:xfrm>
           <a:prstGeom prst="rect">
             <a:avLst/>
@@ -4295,7 +3910,7 @@
           <a:p>
             <a:pPr algn="ctr"/>
             <a:r>
-              <a:rPr sz="3434" b="1" i="0">
+              <a:rPr sz="3700" b="1" i="0">
                 <a:solidFill>
                   <a:srgbClr val="FFFFFF"/>
                 </a:solidFill>
@@ -4314,8 +3929,8 @@
         </p:nvSpPr>
         <p:spPr>
           <a:xfrm>
-            <a:off x="594360" y="2980944"/>
-            <a:ext cx="11002975" cy="347472"/>
+            <a:off x="640080" y="2985516"/>
+            <a:ext cx="10911535" cy="731520"/>
           </a:xfrm>
           <a:prstGeom prst="rect">
             <a:avLst/>
@@ -4330,83 +3945,13 @@
           <a:p>
             <a:pPr algn="ctr"/>
             <a:r>
-              <a:rPr sz="2200" b="0" i="1">
-                <a:solidFill>
-                  <a:srgbClr val="8C8C8C"/>
-                </a:solidFill>
-                <a:latin typeface="Arial"/>
-              </a:rPr>
-              <a:t/>
-            </a:r>
-          </a:p>
-        </p:txBody>
-      </p:sp>
-      <p:sp>
-        <p:nvSpPr>
-          <p:cNvPr id="4" name="TextBox 3"/>
-          <p:cNvSpPr txBox="1"/>
-          <p:nvPr/>
-        </p:nvSpPr>
-        <p:spPr>
-          <a:xfrm>
-            <a:off x="594360" y="3529584"/>
-            <a:ext cx="11002975" cy="685800"/>
-          </a:xfrm>
-          <a:prstGeom prst="rect">
-            <a:avLst/>
-          </a:prstGeom>
-          <a:noFill/>
-        </p:spPr>
-        <p:txBody>
-          <a:bodyPr wrap="square">
-            <a:spAutoFit/>
-          </a:bodyPr>
-          <a:lstStyle/>
-          <a:p>
-            <a:pPr algn="ctr"/>
-            <a:r>
-              <a:rPr sz="4400" b="1" i="0">
+              <a:rPr sz="4800" b="1" i="0">
                 <a:solidFill>
                   <a:srgbClr val="FFFFFF"/>
                 </a:solidFill>
                 <a:latin typeface="Arial"/>
               </a:rPr>
               <a:t>Eu considerei tudo como perdido</a:t>
-            </a:r>
-          </a:p>
-        </p:txBody>
-      </p:sp>
-      <p:sp>
-        <p:nvSpPr>
-          <p:cNvPr id="5" name="TextBox 4"/>
-          <p:cNvSpPr txBox="1"/>
-          <p:nvPr/>
-        </p:nvSpPr>
-        <p:spPr>
-          <a:xfrm>
-            <a:off x="594360" y="4251960"/>
-            <a:ext cx="11002975" cy="347472"/>
-          </a:xfrm>
-          <a:prstGeom prst="rect">
-            <a:avLst/>
-          </a:prstGeom>
-          <a:noFill/>
-        </p:spPr>
-        <p:txBody>
-          <a:bodyPr wrap="square">
-            <a:spAutoFit/>
-          </a:bodyPr>
-          <a:lstStyle/>
-          <a:p>
-            <a:pPr algn="ctr"/>
-            <a:r>
-              <a:rPr sz="2200" b="0" i="1">
-                <a:solidFill>
-                  <a:srgbClr val="8C8C8C"/>
-                </a:solidFill>
-                <a:latin typeface="Arial"/>
-              </a:rPr>
-              <a:t/>
             </a:r>
           </a:p>
         </p:txBody>
@@ -4445,8 +3990,8 @@
         </p:nvSpPr>
         <p:spPr>
           <a:xfrm>
-            <a:off x="594360" y="2258568"/>
-            <a:ext cx="11002975" cy="685800"/>
+            <a:off x="640080" y="2052828"/>
+            <a:ext cx="10911535" cy="731520"/>
           </a:xfrm>
           <a:prstGeom prst="rect">
             <a:avLst/>
@@ -4461,7 +4006,7 @@
           <a:p>
             <a:pPr algn="ctr"/>
             <a:r>
-              <a:rPr sz="2995" b="1" i="0">
+              <a:rPr sz="3200" b="1" i="0">
                 <a:solidFill>
                   <a:srgbClr val="FFFFFF"/>
                 </a:solidFill>
@@ -4480,8 +4025,8 @@
         </p:nvSpPr>
         <p:spPr>
           <a:xfrm>
-            <a:off x="594360" y="2980944"/>
-            <a:ext cx="11002975" cy="347472"/>
+            <a:off x="640080" y="2985516"/>
+            <a:ext cx="10911535" cy="731520"/>
           </a:xfrm>
           <a:prstGeom prst="rect">
             <a:avLst/>
@@ -4496,13 +4041,13 @@
           <a:p>
             <a:pPr algn="ctr"/>
             <a:r>
-              <a:rPr sz="2200" b="0" i="1">
-                <a:solidFill>
-                  <a:srgbClr val="8C8C8C"/>
+              <a:rPr sz="3700" b="1" i="0">
+                <a:solidFill>
+                  <a:srgbClr val="FFFFFF"/>
                 </a:solidFill>
                 <a:latin typeface="Arial"/>
               </a:rPr>
-              <a:t>導いて  その十字架</a:t>
+              <a:t>Traga-me de joelhos, Senhor eu me prostro</a:t>
             </a:r>
           </a:p>
         </p:txBody>
@@ -4515,8 +4060,8 @@
         </p:nvSpPr>
         <p:spPr>
           <a:xfrm>
-            <a:off x="594360" y="3529584"/>
-            <a:ext cx="11002975" cy="685800"/>
+            <a:off x="640080" y="4128516"/>
+            <a:ext cx="10911535" cy="310896"/>
           </a:xfrm>
           <a:prstGeom prst="rect">
             <a:avLst/>
@@ -4531,13 +4076,13 @@
           <a:p>
             <a:pPr algn="ctr"/>
             <a:r>
-              <a:rPr sz="3434" b="1" i="0">
-                <a:solidFill>
-                  <a:srgbClr val="FFFFFF"/>
+              <a:rPr sz="2000" b="0" i="0">
+                <a:solidFill>
+                  <a:srgbClr val="828282"/>
                 </a:solidFill>
                 <a:latin typeface="Arial"/>
               </a:rPr>
-              <a:t>Traga-me de joelhos, Senhor eu me prostro</a:t>
+              <a:t>導いて  その十字架</a:t>
             </a:r>
           </a:p>
         </p:txBody>
@@ -4550,8 +4095,8 @@
         </p:nvSpPr>
         <p:spPr>
           <a:xfrm>
-            <a:off x="594360" y="4251960"/>
-            <a:ext cx="11002975" cy="347472"/>
+            <a:off x="640080" y="4494276"/>
+            <a:ext cx="10911535" cy="310896"/>
           </a:xfrm>
           <a:prstGeom prst="rect">
             <a:avLst/>
@@ -4566,9 +4111,9 @@
           <a:p>
             <a:pPr algn="ctr"/>
             <a:r>
-              <a:rPr sz="2200" b="0" i="1">
-                <a:solidFill>
-                  <a:srgbClr val="8C8C8C"/>
+              <a:rPr sz="2000" b="0" i="0">
+                <a:solidFill>
+                  <a:srgbClr val="828282"/>
                 </a:solidFill>
                 <a:latin typeface="Arial"/>
               </a:rPr>
@@ -4611,8 +4156,8 @@
         </p:nvSpPr>
         <p:spPr>
           <a:xfrm>
-            <a:off x="594360" y="2258568"/>
-            <a:ext cx="11002975" cy="685800"/>
+            <a:off x="640080" y="2052828"/>
+            <a:ext cx="10911535" cy="731520"/>
           </a:xfrm>
           <a:prstGeom prst="rect">
             <a:avLst/>
@@ -4627,7 +4172,7 @@
           <a:p>
             <a:pPr algn="ctr"/>
             <a:r>
-              <a:rPr sz="3520" b="1" i="0">
+              <a:rPr sz="3800" b="1" i="0">
                 <a:solidFill>
                   <a:srgbClr val="FFFFFF"/>
                 </a:solidFill>
@@ -4646,8 +4191,8 @@
         </p:nvSpPr>
         <p:spPr>
           <a:xfrm>
-            <a:off x="594360" y="2980944"/>
-            <a:ext cx="11002975" cy="347472"/>
+            <a:off x="640080" y="2985516"/>
+            <a:ext cx="10911535" cy="731520"/>
           </a:xfrm>
           <a:prstGeom prst="rect">
             <a:avLst/>
@@ -4662,13 +4207,13 @@
           <a:p>
             <a:pPr algn="ctr"/>
             <a:r>
-              <a:rPr sz="2200" b="0" i="1">
-                <a:solidFill>
-                  <a:srgbClr val="8C8C8C"/>
+              <a:rPr sz="4800" b="1" i="0">
+                <a:solidFill>
+                  <a:srgbClr val="FFFFFF"/>
                 </a:solidFill>
                 <a:latin typeface="Arial"/>
               </a:rPr>
-              <a:t>何もかも捨て去って    行こう</a:t>
+              <a:t>Leva-me, leva-me para a cruz</a:t>
             </a:r>
           </a:p>
         </p:txBody>
@@ -4681,8 +4226,8 @@
         </p:nvSpPr>
         <p:spPr>
           <a:xfrm>
-            <a:off x="594360" y="3529584"/>
-            <a:ext cx="11002975" cy="685800"/>
+            <a:off x="640080" y="4128516"/>
+            <a:ext cx="10911535" cy="310896"/>
           </a:xfrm>
           <a:prstGeom prst="rect">
             <a:avLst/>
@@ -4697,13 +4242,13 @@
           <a:p>
             <a:pPr algn="ctr"/>
             <a:r>
-              <a:rPr sz="4400" b="1" i="0">
-                <a:solidFill>
-                  <a:srgbClr val="FFFFFF"/>
+              <a:rPr sz="2000" b="0" i="0">
+                <a:solidFill>
+                  <a:srgbClr val="828282"/>
                 </a:solidFill>
                 <a:latin typeface="Arial"/>
               </a:rPr>
-              <a:t>Leva-me, leva-me para a cruz</a:t>
+              <a:t>何もかも捨て去って    行こう</a:t>
             </a:r>
           </a:p>
         </p:txBody>
@@ -4716,8 +4261,8 @@
         </p:nvSpPr>
         <p:spPr>
           <a:xfrm>
-            <a:off x="594360" y="4251960"/>
-            <a:ext cx="11002975" cy="347472"/>
+            <a:off x="640080" y="4494276"/>
+            <a:ext cx="10911535" cy="310896"/>
           </a:xfrm>
           <a:prstGeom prst="rect">
             <a:avLst/>
@@ -4732,9 +4277,9 @@
           <a:p>
             <a:pPr algn="ctr"/>
             <a:r>
-              <a:rPr sz="2200" b="0" i="1">
-                <a:solidFill>
-                  <a:srgbClr val="8C8C8C"/>
+              <a:rPr sz="2000" b="0" i="0">
+                <a:solidFill>
+                  <a:srgbClr val="828282"/>
                 </a:solidFill>
                 <a:latin typeface="Arial"/>
               </a:rPr>
@@ -4777,8 +4322,8 @@
         </p:nvSpPr>
         <p:spPr>
           <a:xfrm>
-            <a:off x="594360" y="2894076"/>
-            <a:ext cx="11002975" cy="685800"/>
+            <a:off x="640080" y="2702052"/>
+            <a:ext cx="10911535" cy="731520"/>
           </a:xfrm>
           <a:prstGeom prst="rect">
             <a:avLst/>
@@ -4793,48 +4338,13 @@
           <a:p>
             <a:pPr algn="ctr"/>
             <a:r>
-              <a:rPr sz="4400" b="1" i="0">
+              <a:rPr sz="4800" b="1" i="0">
                 <a:solidFill>
                   <a:srgbClr val="FFFFFF"/>
                 </a:solidFill>
                 <a:latin typeface="Arial"/>
               </a:rPr>
               <a:t>Tu és o verbo se tornou carne</a:t>
-            </a:r>
-          </a:p>
-        </p:txBody>
-      </p:sp>
-      <p:sp>
-        <p:nvSpPr>
-          <p:cNvPr id="3" name="TextBox 2"/>
-          <p:cNvSpPr txBox="1"/>
-          <p:nvPr/>
-        </p:nvSpPr>
-        <p:spPr>
-          <a:xfrm>
-            <a:off x="594360" y="3616452"/>
-            <a:ext cx="11002975" cy="347472"/>
-          </a:xfrm>
-          <a:prstGeom prst="rect">
-            <a:avLst/>
-          </a:prstGeom>
-          <a:noFill/>
-        </p:spPr>
-        <p:txBody>
-          <a:bodyPr wrap="square">
-            <a:spAutoFit/>
-          </a:bodyPr>
-          <a:lstStyle/>
-          <a:p>
-            <a:pPr algn="ctr"/>
-            <a:r>
-              <a:rPr sz="2200" b="0" i="1">
-                <a:solidFill>
-                  <a:srgbClr val="8C8C8C"/>
-                </a:solidFill>
-                <a:latin typeface="Arial"/>
-              </a:rPr>
-              <a:t/>
             </a:r>
           </a:p>
         </p:txBody>
@@ -4873,8 +4383,8 @@
         </p:nvSpPr>
         <p:spPr>
           <a:xfrm>
-            <a:off x="594360" y="1837944"/>
-            <a:ext cx="11002975" cy="685800"/>
+            <a:off x="640080" y="1650492"/>
+            <a:ext cx="10911535" cy="731520"/>
           </a:xfrm>
           <a:prstGeom prst="rect">
             <a:avLst/>
@@ -4889,7 +4399,7 @@
           <a:p>
             <a:pPr algn="ctr"/>
             <a:r>
-              <a:rPr sz="4400" b="1" i="0">
+              <a:rPr sz="4800" b="1" i="0">
                 <a:solidFill>
                   <a:srgbClr val="FFFFFF"/>
                 </a:solidFill>
@@ -4908,8 +4418,8 @@
         </p:nvSpPr>
         <p:spPr>
           <a:xfrm>
-            <a:off x="594360" y="2560320"/>
-            <a:ext cx="11002975" cy="384048"/>
+            <a:off x="640080" y="2418588"/>
+            <a:ext cx="10911535" cy="365760"/>
           </a:xfrm>
           <a:prstGeom prst="rect">
             <a:avLst/>
@@ -4926,7 +4436,7 @@
             <a:r>
               <a:rPr sz="2400" b="0" i="1">
                 <a:solidFill>
-                  <a:srgbClr val="B4B4B4"/>
+                  <a:srgbClr val="AAAAAA"/>
                 </a:solidFill>
                 <a:latin typeface="Arial"/>
               </a:rPr>
@@ -4943,8 +4453,8 @@
         </p:nvSpPr>
         <p:spPr>
           <a:xfrm>
-            <a:off x="594360" y="2980944"/>
-            <a:ext cx="11002975" cy="347472"/>
+            <a:off x="640080" y="2985516"/>
+            <a:ext cx="10911535" cy="731520"/>
           </a:xfrm>
           <a:prstGeom prst="rect">
             <a:avLst/>
@@ -4959,13 +4469,13 @@
           <a:p>
             <a:pPr algn="ctr"/>
             <a:r>
-              <a:rPr sz="2000" b="0" i="1">
-                <a:solidFill>
-                  <a:srgbClr val="8C8C8C"/>
+              <a:rPr sz="4800" b="1" i="0">
+                <a:solidFill>
+                  <a:srgbClr val="FFFFFF"/>
                 </a:solidFill>
                 <a:latin typeface="Arial"/>
               </a:rPr>
-              <a:t/>
+              <a:t>人となり 死を請けて   よみがえった</a:t>
             </a:r>
           </a:p>
         </p:txBody>
@@ -4978,8 +4488,8 @@
         </p:nvSpPr>
         <p:spPr>
           <a:xfrm>
-            <a:off x="594360" y="3529584"/>
-            <a:ext cx="11002975" cy="685800"/>
+            <a:off x="640080" y="3753612"/>
+            <a:ext cx="10911535" cy="365760"/>
           </a:xfrm>
           <a:prstGeom prst="rect">
             <a:avLst/>
@@ -4994,13 +4504,13 @@
           <a:p>
             <a:pPr algn="ctr"/>
             <a:r>
-              <a:rPr sz="4400" b="1" i="0">
-                <a:solidFill>
-                  <a:srgbClr val="FFFFFF"/>
+              <a:rPr sz="2400" b="0" i="1">
+                <a:solidFill>
+                  <a:srgbClr val="AAAAAA"/>
                 </a:solidFill>
                 <a:latin typeface="Arial"/>
               </a:rPr>
-              <a:t>人となり 死を請けて   よみがえった</a:t>
+              <a:t>hito tonari shi wo ukete yomigaetta</a:t>
             </a:r>
           </a:p>
         </p:txBody>
@@ -5013,8 +4523,8 @@
         </p:nvSpPr>
         <p:spPr>
           <a:xfrm>
-            <a:off x="594360" y="4251960"/>
-            <a:ext cx="11002975" cy="384048"/>
+            <a:off x="640080" y="4530852"/>
+            <a:ext cx="10911535" cy="310896"/>
           </a:xfrm>
           <a:prstGeom prst="rect">
             <a:avLst/>
@@ -5029,13 +4539,13 @@
           <a:p>
             <a:pPr algn="ctr"/>
             <a:r>
-              <a:rPr sz="2400" b="0" i="1">
-                <a:solidFill>
-                  <a:srgbClr val="B4B4B4"/>
+              <a:rPr sz="2000" b="0" i="1">
+                <a:solidFill>
+                  <a:srgbClr val="828282"/>
                 </a:solidFill>
                 <a:latin typeface="Arial"/>
               </a:rPr>
-              <a:t>hito tonari shi wo ukete yomigaetta</a:t>
+              <a:t>Salvador, eu venho</a:t>
             </a:r>
           </a:p>
         </p:txBody>
@@ -5048,8 +4558,8 @@
         </p:nvSpPr>
         <p:spPr>
           <a:xfrm>
-            <a:off x="594360" y="4672584"/>
-            <a:ext cx="11002975" cy="347472"/>
+            <a:off x="640080" y="4896612"/>
+            <a:ext cx="10911535" cy="310896"/>
           </a:xfrm>
           <a:prstGeom prst="rect">
             <a:avLst/>
@@ -5066,11 +4576,11 @@
             <a:r>
               <a:rPr sz="2000" b="0" i="1">
                 <a:solidFill>
-                  <a:srgbClr val="8C8C8C"/>
+                  <a:srgbClr val="828282"/>
                 </a:solidFill>
                 <a:latin typeface="Arial"/>
               </a:rPr>
-              <a:t/>
+              <a:t>Aquieto a minha alma e me lembro</a:t>
             </a:r>
           </a:p>
         </p:txBody>
@@ -5109,8 +4619,8 @@
         </p:nvSpPr>
         <p:spPr>
           <a:xfrm>
-            <a:off x="594360" y="2683764"/>
-            <a:ext cx="11002975" cy="685800"/>
+            <a:off x="640080" y="2500884"/>
+            <a:ext cx="10911535" cy="731520"/>
           </a:xfrm>
           <a:prstGeom prst="rect">
             <a:avLst/>
@@ -5125,7 +4635,7 @@
           <a:p>
             <a:pPr algn="ctr"/>
             <a:r>
-              <a:rPr sz="4400" b="1" i="0">
+              <a:rPr sz="4800" b="1" i="0">
                 <a:solidFill>
                   <a:srgbClr val="FFFFFF"/>
                 </a:solidFill>
@@ -5144,8 +4654,8 @@
         </p:nvSpPr>
         <p:spPr>
           <a:xfrm>
-            <a:off x="594360" y="3406140"/>
-            <a:ext cx="11002975" cy="384048"/>
+            <a:off x="640080" y="3268980"/>
+            <a:ext cx="10911535" cy="365760"/>
           </a:xfrm>
           <a:prstGeom prst="rect">
             <a:avLst/>
@@ -5162,46 +4672,11 @@
             <a:r>
               <a:rPr sz="2400" b="0" i="1">
                 <a:solidFill>
-                  <a:srgbClr val="B4B4B4"/>
+                  <a:srgbClr val="AAAAAA"/>
                 </a:solidFill>
                 <a:latin typeface="Arial"/>
               </a:rPr>
               <a:t>watashi no tame ni nagasareta chi</a:t>
-            </a:r>
-          </a:p>
-        </p:txBody>
-      </p:sp>
-      <p:sp>
-        <p:nvSpPr>
-          <p:cNvPr id="4" name="TextBox 3"/>
-          <p:cNvSpPr txBox="1"/>
-          <p:nvPr/>
-        </p:nvSpPr>
-        <p:spPr>
-          <a:xfrm>
-            <a:off x="594360" y="3826764"/>
-            <a:ext cx="11002975" cy="347472"/>
-          </a:xfrm>
-          <a:prstGeom prst="rect">
-            <a:avLst/>
-          </a:prstGeom>
-          <a:noFill/>
-        </p:spPr>
-        <p:txBody>
-          <a:bodyPr wrap="square">
-            <a:spAutoFit/>
-          </a:bodyPr>
-          <a:lstStyle/>
-          <a:p>
-            <a:pPr algn="ctr"/>
-            <a:r>
-              <a:rPr sz="2000" b="0" i="1">
-                <a:solidFill>
-                  <a:srgbClr val="8C8C8C"/>
-                </a:solidFill>
-                <a:latin typeface="Arial"/>
-              </a:rPr>
-              <a:t/>
             </a:r>
           </a:p>
         </p:txBody>
@@ -5240,8 +4715,8 @@
         </p:nvSpPr>
         <p:spPr>
           <a:xfrm>
-            <a:off x="594360" y="1837944"/>
-            <a:ext cx="11002975" cy="685800"/>
+            <a:off x="640080" y="1650492"/>
+            <a:ext cx="10911535" cy="731520"/>
           </a:xfrm>
           <a:prstGeom prst="rect">
             <a:avLst/>
@@ -5256,7 +4731,7 @@
           <a:p>
             <a:pPr algn="ctr"/>
             <a:r>
-              <a:rPr sz="4400" b="1" i="0">
+              <a:rPr sz="4800" b="1" i="0">
                 <a:solidFill>
                   <a:srgbClr val="FFFFFF"/>
                 </a:solidFill>
@@ -5275,8 +4750,8 @@
         </p:nvSpPr>
         <p:spPr>
           <a:xfrm>
-            <a:off x="594360" y="2560320"/>
-            <a:ext cx="11002975" cy="384048"/>
+            <a:off x="640080" y="2418588"/>
+            <a:ext cx="10911535" cy="365760"/>
           </a:xfrm>
           <a:prstGeom prst="rect">
             <a:avLst/>
@@ -5293,7 +4768,7 @@
             <a:r>
               <a:rPr sz="2400" b="0" i="1">
                 <a:solidFill>
-                  <a:srgbClr val="B4B4B4"/>
+                  <a:srgbClr val="AAAAAA"/>
                 </a:solidFill>
                 <a:latin typeface="Arial"/>
               </a:rPr>
@@ -5310,8 +4785,8 @@
         </p:nvSpPr>
         <p:spPr>
           <a:xfrm>
-            <a:off x="594360" y="2980944"/>
-            <a:ext cx="11002975" cy="347472"/>
+            <a:off x="640080" y="2985516"/>
+            <a:ext cx="10911535" cy="731520"/>
           </a:xfrm>
           <a:prstGeom prst="rect">
             <a:avLst/>
@@ -5326,13 +4801,13 @@
           <a:p>
             <a:pPr algn="ctr"/>
             <a:r>
-              <a:rPr sz="2000" b="0" i="1">
-                <a:solidFill>
-                  <a:srgbClr val="8C8C8C"/>
+              <a:rPr sz="4800" b="1" i="0">
+                <a:solidFill>
+                  <a:srgbClr val="FFFFFF"/>
                 </a:solidFill>
                 <a:latin typeface="Arial"/>
               </a:rPr>
-              <a:t>Leva-me para a cruz onde Seu amor foi derramado</a:t>
+              <a:t>ひざまずく  主の前で</a:t>
             </a:r>
           </a:p>
         </p:txBody>
@@ -5345,8 +4820,8 @@
         </p:nvSpPr>
         <p:spPr>
           <a:xfrm>
-            <a:off x="594360" y="3529584"/>
-            <a:ext cx="11002975" cy="685800"/>
+            <a:off x="640080" y="3753612"/>
+            <a:ext cx="10911535" cy="365760"/>
           </a:xfrm>
           <a:prstGeom prst="rect">
             <a:avLst/>
@@ -5361,13 +4836,13 @@
           <a:p>
             <a:pPr algn="ctr"/>
             <a:r>
-              <a:rPr sz="4400" b="1" i="0">
-                <a:solidFill>
-                  <a:srgbClr val="FFFFFF"/>
+              <a:rPr sz="2400" b="0" i="1">
+                <a:solidFill>
+                  <a:srgbClr val="AAAAAA"/>
                 </a:solidFill>
                 <a:latin typeface="Arial"/>
               </a:rPr>
-              <a:t>ひざまずく  主の前で</a:t>
+              <a:t>hizamazuku shu no mae de</a:t>
             </a:r>
           </a:p>
         </p:txBody>
@@ -5380,8 +4855,8 @@
         </p:nvSpPr>
         <p:spPr>
           <a:xfrm>
-            <a:off x="594360" y="4251960"/>
-            <a:ext cx="11002975" cy="384048"/>
+            <a:off x="640080" y="4530852"/>
+            <a:ext cx="10911535" cy="310896"/>
           </a:xfrm>
           <a:prstGeom prst="rect">
             <a:avLst/>
@@ -5396,13 +4871,13 @@
           <a:p>
             <a:pPr algn="ctr"/>
             <a:r>
-              <a:rPr sz="2400" b="0" i="1">
-                <a:solidFill>
-                  <a:srgbClr val="B4B4B4"/>
+              <a:rPr sz="2000" b="0" i="1">
+                <a:solidFill>
+                  <a:srgbClr val="828282"/>
                 </a:solidFill>
                 <a:latin typeface="Arial"/>
               </a:rPr>
-              <a:t>hizamazuku shu no mae de</a:t>
+              <a:t>Leva-me para a cruz onde Seu amor foi derramado</a:t>
             </a:r>
           </a:p>
         </p:txBody>
@@ -5415,8 +4890,8 @@
         </p:nvSpPr>
         <p:spPr>
           <a:xfrm>
-            <a:off x="594360" y="4672584"/>
-            <a:ext cx="11002975" cy="347472"/>
+            <a:off x="640080" y="4896612"/>
+            <a:ext cx="10911535" cy="310896"/>
           </a:xfrm>
           <a:prstGeom prst="rect">
             <a:avLst/>
@@ -5433,7 +4908,7 @@
             <a:r>
               <a:rPr sz="2000" b="0" i="1">
                 <a:solidFill>
-                  <a:srgbClr val="8C8C8C"/>
+                  <a:srgbClr val="828282"/>
                 </a:solidFill>
                 <a:latin typeface="Arial"/>
               </a:rPr>

--- a/output_pptx/Lead_Me_To_The_Cross.pptx
+++ b/output_pptx/Lead_Me_To_The_Cross.pptx
@@ -3179,6 +3179,76 @@
           </a:p>
         </p:txBody>
       </p:sp>
+      <p:sp>
+        <p:nvSpPr>
+          <p:cNvPr id="4" name="TextBox 3"/>
+          <p:cNvSpPr txBox="1"/>
+          <p:nvPr/>
+        </p:nvSpPr>
+        <p:spPr>
+          <a:xfrm>
+            <a:off x="640080" y="4128516"/>
+            <a:ext cx="10911535" cy="310896"/>
+          </a:xfrm>
+          <a:prstGeom prst="rect">
+            <a:avLst/>
+          </a:prstGeom>
+          <a:noFill/>
+        </p:spPr>
+        <p:txBody>
+          <a:bodyPr wrap="square">
+            <a:spAutoFit/>
+          </a:bodyPr>
+          <a:lstStyle/>
+          <a:p>
+            <a:pPr algn="ctr"/>
+            <a:r>
+              <a:rPr sz="2000" b="0" i="0">
+                <a:solidFill>
+                  <a:srgbClr val="828282"/>
+                </a:solidFill>
+                <a:latin typeface="Arial"/>
+              </a:rPr>
+              <a:t>救い主よ、私は来ます</a:t>
+            </a:r>
+          </a:p>
+        </p:txBody>
+      </p:sp>
+      <p:sp>
+        <p:nvSpPr>
+          <p:cNvPr id="5" name="TextBox 4"/>
+          <p:cNvSpPr txBox="1"/>
+          <p:nvPr/>
+        </p:nvSpPr>
+        <p:spPr>
+          <a:xfrm>
+            <a:off x="640080" y="4494276"/>
+            <a:ext cx="10911535" cy="310896"/>
+          </a:xfrm>
+          <a:prstGeom prst="rect">
+            <a:avLst/>
+          </a:prstGeom>
+          <a:noFill/>
+        </p:spPr>
+        <p:txBody>
+          <a:bodyPr wrap="square">
+            <a:spAutoFit/>
+          </a:bodyPr>
+          <a:lstStyle/>
+          <a:p>
+            <a:pPr algn="ctr"/>
+            <a:r>
+              <a:rPr sz="2000" b="0" i="0">
+                <a:solidFill>
+                  <a:srgbClr val="828282"/>
+                </a:solidFill>
+                <a:latin typeface="Arial"/>
+              </a:rPr>
+              <a:t>私の魂を静め、思い出します</a:t>
+            </a:r>
+          </a:p>
+        </p:txBody>
+      </p:sp>
     </p:spTree>
   </p:cSld>
   <p:clrMapOvr>
@@ -3511,6 +3581,76 @@
           </a:p>
         </p:txBody>
       </p:sp>
+      <p:sp>
+        <p:nvSpPr>
+          <p:cNvPr id="4" name="TextBox 3"/>
+          <p:cNvSpPr txBox="1"/>
+          <p:nvPr/>
+        </p:nvSpPr>
+        <p:spPr>
+          <a:xfrm>
+            <a:off x="640080" y="4128516"/>
+            <a:ext cx="10911535" cy="310896"/>
+          </a:xfrm>
+          <a:prstGeom prst="rect">
+            <a:avLst/>
+          </a:prstGeom>
+          <a:noFill/>
+        </p:spPr>
+        <p:txBody>
+          <a:bodyPr wrap="square">
+            <a:spAutoFit/>
+          </a:bodyPr>
+          <a:lstStyle/>
+          <a:p>
+            <a:pPr algn="ctr"/>
+            <a:r>
+              <a:rPr sz="2000" b="0" i="0">
+                <a:solidFill>
+                  <a:srgbClr val="828282"/>
+                </a:solidFill>
+                <a:latin typeface="Arial"/>
+              </a:rPr>
+              <a:t>私の罪と死を耐え忍ばれた</a:t>
+            </a:r>
+          </a:p>
+        </p:txBody>
+      </p:sp>
+      <p:sp>
+        <p:nvSpPr>
+          <p:cNvPr id="5" name="TextBox 4"/>
+          <p:cNvSpPr txBox="1"/>
+          <p:nvPr/>
+        </p:nvSpPr>
+        <p:spPr>
+          <a:xfrm>
+            <a:off x="640080" y="4494276"/>
+            <a:ext cx="10911535" cy="310896"/>
+          </a:xfrm>
+          <a:prstGeom prst="rect">
+            <a:avLst/>
+          </a:prstGeom>
+          <a:noFill/>
+        </p:spPr>
+        <p:txBody>
+          <a:bodyPr wrap="square">
+            <a:spAutoFit/>
+          </a:bodyPr>
+          <a:lstStyle/>
+          <a:p>
+            <a:pPr algn="ctr"/>
+            <a:r>
+              <a:rPr sz="2000" b="0" i="0">
+                <a:solidFill>
+                  <a:srgbClr val="828282"/>
+                </a:solidFill>
+                <a:latin typeface="Arial"/>
+              </a:rPr>
+              <a:t>今あなたは復活されました</a:t>
+            </a:r>
+          </a:p>
+        </p:txBody>
+      </p:sp>
     </p:spTree>
   </p:cSld>
   <p:clrMapOvr>
@@ -3607,6 +3747,76 @@
           </a:p>
         </p:txBody>
       </p:sp>
+      <p:sp>
+        <p:nvSpPr>
+          <p:cNvPr id="4" name="TextBox 3"/>
+          <p:cNvSpPr txBox="1"/>
+          <p:nvPr/>
+        </p:nvSpPr>
+        <p:spPr>
+          <a:xfrm>
+            <a:off x="640080" y="4128516"/>
+            <a:ext cx="10911535" cy="310896"/>
+          </a:xfrm>
+          <a:prstGeom prst="rect">
+            <a:avLst/>
+          </a:prstGeom>
+          <a:noFill/>
+        </p:spPr>
+        <p:txBody>
+          <a:bodyPr wrap="square">
+            <a:spAutoFit/>
+          </a:bodyPr>
+          <a:lstStyle/>
+          <a:p>
+            <a:pPr algn="ctr"/>
+            <a:r>
+              <a:rPr sz="2000" b="0" i="0">
+                <a:solidFill>
+                  <a:srgbClr val="828282"/>
+                </a:solidFill>
+                <a:latin typeface="Arial"/>
+              </a:rPr>
+              <a:t>あなたの心のために、あなたの心のために</a:t>
+            </a:r>
+          </a:p>
+        </p:txBody>
+      </p:sp>
+      <p:sp>
+        <p:nvSpPr>
+          <p:cNvPr id="5" name="TextBox 4"/>
+          <p:cNvSpPr txBox="1"/>
+          <p:nvPr/>
+        </p:nvSpPr>
+        <p:spPr>
+          <a:xfrm>
+            <a:off x="640080" y="4494276"/>
+            <a:ext cx="10911535" cy="310896"/>
+          </a:xfrm>
+          <a:prstGeom prst="rect">
+            <a:avLst/>
+          </a:prstGeom>
+          <a:noFill/>
+        </p:spPr>
+        <p:txBody>
+          <a:bodyPr wrap="square">
+            <a:spAutoFit/>
+          </a:bodyPr>
+          <a:lstStyle/>
+          <a:p>
+            <a:pPr algn="ctr"/>
+            <a:r>
+              <a:rPr sz="2000" b="0" i="0">
+                <a:solidFill>
+                  <a:srgbClr val="828282"/>
+                </a:solidFill>
+                <a:latin typeface="Arial"/>
+              </a:rPr>
+              <a:t>私をあなたの心へ導いてください</a:t>
+            </a:r>
+          </a:p>
+        </p:txBody>
+      </p:sp>
     </p:spTree>
   </p:cSld>
   <p:clrMapOvr>
@@ -3703,6 +3913,76 @@
           </a:p>
         </p:txBody>
       </p:sp>
+      <p:sp>
+        <p:nvSpPr>
+          <p:cNvPr id="4" name="TextBox 3"/>
+          <p:cNvSpPr txBox="1"/>
+          <p:nvPr/>
+        </p:nvSpPr>
+        <p:spPr>
+          <a:xfrm>
+            <a:off x="640080" y="4128516"/>
+            <a:ext cx="10911535" cy="310896"/>
+          </a:xfrm>
+          <a:prstGeom prst="rect">
+            <a:avLst/>
+          </a:prstGeom>
+          <a:noFill/>
+        </p:spPr>
+        <p:txBody>
+          <a:bodyPr wrap="square">
+            <a:spAutoFit/>
+          </a:bodyPr>
+          <a:lstStyle/>
+          <a:p>
+            <a:pPr algn="ctr"/>
+            <a:r>
+              <a:rPr sz="2000" b="0" i="0">
+                <a:solidFill>
+                  <a:srgbClr val="828282"/>
+                </a:solidFill>
+                <a:latin typeface="Arial"/>
+              </a:rPr>
+              <a:t>あなたの心のために、あなたの心のために</a:t>
+            </a:r>
+          </a:p>
+        </p:txBody>
+      </p:sp>
+      <p:sp>
+        <p:nvSpPr>
+          <p:cNvPr id="5" name="TextBox 4"/>
+          <p:cNvSpPr txBox="1"/>
+          <p:nvPr/>
+        </p:nvSpPr>
+        <p:spPr>
+          <a:xfrm>
+            <a:off x="640080" y="4494276"/>
+            <a:ext cx="10911535" cy="310896"/>
+          </a:xfrm>
+          <a:prstGeom prst="rect">
+            <a:avLst/>
+          </a:prstGeom>
+          <a:noFill/>
+        </p:spPr>
+        <p:txBody>
+          <a:bodyPr wrap="square">
+            <a:spAutoFit/>
+          </a:bodyPr>
+          <a:lstStyle/>
+          <a:p>
+            <a:pPr algn="ctr"/>
+            <a:r>
+              <a:rPr sz="2000" b="0" i="0">
+                <a:solidFill>
+                  <a:srgbClr val="828282"/>
+                </a:solidFill>
+                <a:latin typeface="Arial"/>
+              </a:rPr>
+              <a:t>私をあなたの心へ導いてください</a:t>
+            </a:r>
+          </a:p>
+        </p:txBody>
+      </p:sp>
     </p:spTree>
   </p:cSld>
   <p:clrMapOvr>
@@ -3764,6 +4044,41 @@
           </a:p>
         </p:txBody>
       </p:sp>
+      <p:sp>
+        <p:nvSpPr>
+          <p:cNvPr id="3" name="TextBox 2"/>
+          <p:cNvSpPr txBox="1"/>
+          <p:nvPr/>
+        </p:nvSpPr>
+        <p:spPr>
+          <a:xfrm>
+            <a:off x="640080" y="3845052"/>
+            <a:ext cx="10911535" cy="310896"/>
+          </a:xfrm>
+          <a:prstGeom prst="rect">
+            <a:avLst/>
+          </a:prstGeom>
+          <a:noFill/>
+        </p:spPr>
+        <p:txBody>
+          <a:bodyPr wrap="square">
+            <a:spAutoFit/>
+          </a:bodyPr>
+          <a:lstStyle/>
+          <a:p>
+            <a:pPr algn="ctr"/>
+            <a:r>
+              <a:rPr sz="2000" b="0" i="0">
+                <a:solidFill>
+                  <a:srgbClr val="828282"/>
+                </a:solidFill>
+                <a:latin typeface="Arial"/>
+              </a:rPr>
+              <a:t>あなたの心のために、あなたの心のために</a:t>
+            </a:r>
+          </a:p>
+        </p:txBody>
+      </p:sp>
     </p:spTree>
   </p:cSld>
   <p:clrMapOvr>
@@ -3860,6 +4175,76 @@
           </a:p>
         </p:txBody>
       </p:sp>
+      <p:sp>
+        <p:nvSpPr>
+          <p:cNvPr id="4" name="TextBox 3"/>
+          <p:cNvSpPr txBox="1"/>
+          <p:nvPr/>
+        </p:nvSpPr>
+        <p:spPr>
+          <a:xfrm>
+            <a:off x="640080" y="4128516"/>
+            <a:ext cx="10911535" cy="310896"/>
+          </a:xfrm>
+          <a:prstGeom prst="rect">
+            <a:avLst/>
+          </a:prstGeom>
+          <a:noFill/>
+        </p:spPr>
+        <p:txBody>
+          <a:bodyPr wrap="square">
+            <a:spAutoFit/>
+          </a:bodyPr>
+          <a:lstStyle/>
+          <a:p>
+            <a:pPr algn="ctr"/>
+            <a:r>
+              <a:rPr sz="2000" b="0" i="0">
+                <a:solidFill>
+                  <a:srgbClr val="828282"/>
+                </a:solidFill>
+                <a:latin typeface="Arial"/>
+              </a:rPr>
+              <a:t>贖いの山で、あなたの血が流された</a:t>
+            </a:r>
+          </a:p>
+        </p:txBody>
+      </p:sp>
+      <p:sp>
+        <p:nvSpPr>
+          <p:cNvPr id="5" name="TextBox 4"/>
+          <p:cNvSpPr txBox="1"/>
+          <p:nvPr/>
+        </p:nvSpPr>
+        <p:spPr>
+          <a:xfrm>
+            <a:off x="640080" y="4494276"/>
+            <a:ext cx="10911535" cy="310896"/>
+          </a:xfrm>
+          <a:prstGeom prst="rect">
+            <a:avLst/>
+          </a:prstGeom>
+          <a:noFill/>
+        </p:spPr>
+        <p:txBody>
+          <a:bodyPr wrap="square">
+            <a:spAutoFit/>
+          </a:bodyPr>
+          <a:lstStyle/>
+          <a:p>
+            <a:pPr algn="ctr"/>
+            <a:r>
+              <a:rPr sz="2000" b="0" i="0">
+                <a:solidFill>
+                  <a:srgbClr val="828282"/>
+                </a:solidFill>
+                <a:latin typeface="Arial"/>
+              </a:rPr>
+              <a:t>私の身代金のために</a:t>
+            </a:r>
+          </a:p>
+        </p:txBody>
+      </p:sp>
     </p:spTree>
   </p:cSld>
   <p:clrMapOvr>
@@ -3956,6 +4341,76 @@
           </a:p>
         </p:txBody>
       </p:sp>
+      <p:sp>
+        <p:nvSpPr>
+          <p:cNvPr id="4" name="TextBox 3"/>
+          <p:cNvSpPr txBox="1"/>
+          <p:nvPr/>
+        </p:nvSpPr>
+        <p:spPr>
+          <a:xfrm>
+            <a:off x="640080" y="4128516"/>
+            <a:ext cx="10911535" cy="310896"/>
+          </a:xfrm>
+          <a:prstGeom prst="rect">
+            <a:avLst/>
+          </a:prstGeom>
+          <a:noFill/>
+        </p:spPr>
+        <p:txBody>
+          <a:bodyPr wrap="square">
+            <a:spAutoFit/>
+          </a:bodyPr>
+          <a:lstStyle/>
+          <a:p>
+            <a:pPr algn="ctr"/>
+            <a:r>
+              <a:rPr sz="2000" b="0" i="0">
+                <a:solidFill>
+                  <a:srgbClr val="828282"/>
+                </a:solidFill>
+                <a:latin typeface="Arial"/>
+              </a:rPr>
+              <a:t>かつて私はすべてを高い代価で守りました</a:t>
+            </a:r>
+          </a:p>
+        </p:txBody>
+      </p:sp>
+      <p:sp>
+        <p:nvSpPr>
+          <p:cNvPr id="5" name="TextBox 4"/>
+          <p:cNvSpPr txBox="1"/>
+          <p:nvPr/>
+        </p:nvSpPr>
+        <p:spPr>
+          <a:xfrm>
+            <a:off x="640080" y="4494276"/>
+            <a:ext cx="10911535" cy="310896"/>
+          </a:xfrm>
+          <a:prstGeom prst="rect">
+            <a:avLst/>
+          </a:prstGeom>
+          <a:noFill/>
+        </p:spPr>
+        <p:txBody>
+          <a:bodyPr wrap="square">
+            <a:spAutoFit/>
+          </a:bodyPr>
+          <a:lstStyle/>
+          <a:p>
+            <a:pPr algn="ctr"/>
+            <a:r>
+              <a:rPr sz="2000" b="0" i="0">
+                <a:solidFill>
+                  <a:srgbClr val="828282"/>
+                </a:solidFill>
+                <a:latin typeface="Arial"/>
+              </a:rPr>
+              <a:t>私はすべてを失われたものと考えました</a:t>
+            </a:r>
+          </a:p>
+        </p:txBody>
+      </p:sp>
     </p:spTree>
   </p:cSld>
   <p:clrMapOvr>
@@ -4349,6 +4804,41 @@
           </a:p>
         </p:txBody>
       </p:sp>
+      <p:sp>
+        <p:nvSpPr>
+          <p:cNvPr id="3" name="TextBox 2"/>
+          <p:cNvSpPr txBox="1"/>
+          <p:nvPr/>
+        </p:nvSpPr>
+        <p:spPr>
+          <a:xfrm>
+            <a:off x="640080" y="3845052"/>
+            <a:ext cx="10911535" cy="310896"/>
+          </a:xfrm>
+          <a:prstGeom prst="rect">
+            <a:avLst/>
+          </a:prstGeom>
+          <a:noFill/>
+        </p:spPr>
+        <p:txBody>
+          <a:bodyPr wrap="square">
+            <a:spAutoFit/>
+          </a:bodyPr>
+          <a:lstStyle/>
+          <a:p>
+            <a:pPr algn="ctr"/>
+            <a:r>
+              <a:rPr sz="2000" b="0" i="0">
+                <a:solidFill>
+                  <a:srgbClr val="828282"/>
+                </a:solidFill>
+                <a:latin typeface="Arial"/>
+              </a:rPr>
+              <a:t>あなたはみことばが肉となられた</a:t>
+            </a:r>
+          </a:p>
+        </p:txBody>
+      </p:sp>
     </p:spTree>
   </p:cSld>
   <p:clrMapOvr>
@@ -4677,6 +5167,41 @@
                 <a:latin typeface="Arial"/>
               </a:rPr>
               <a:t>watashi no tame ni nagasareta chi</a:t>
+            </a:r>
+          </a:p>
+        </p:txBody>
+      </p:sp>
+      <p:sp>
+        <p:nvSpPr>
+          <p:cNvPr id="4" name="TextBox 3"/>
+          <p:cNvSpPr txBox="1"/>
+          <p:nvPr/>
+        </p:nvSpPr>
+        <p:spPr>
+          <a:xfrm>
+            <a:off x="640080" y="4046220"/>
+            <a:ext cx="10911535" cy="310896"/>
+          </a:xfrm>
+          <a:prstGeom prst="rect">
+            <a:avLst/>
+          </a:prstGeom>
+          <a:noFill/>
+        </p:spPr>
+        <p:txBody>
+          <a:bodyPr wrap="square">
+            <a:spAutoFit/>
+          </a:bodyPr>
+          <a:lstStyle/>
+          <a:p>
+            <a:pPr algn="ctr"/>
+            <a:r>
+              <a:rPr sz="2000" b="0" i="1">
+                <a:solidFill>
+                  <a:srgbClr val="828282"/>
+                </a:solidFill>
+                <a:latin typeface="Arial"/>
+              </a:rPr>
+              <a:t>O sangue derramado por mim</a:t>
             </a:r>
           </a:p>
         </p:txBody>
